--- a/instructor/slides/pptx/lectures/L55.pptx
+++ b/instructor/slides/pptx/lectures/L55.pptx
@@ -4588,8 +4588,8 @@
         </p:nvSpPr>
         <p:spPr>
           <a:xfrm>
-            <a:off x="640080" y="1920240"/>
-            <a:ext cx="10972800" cy="1463040"/>
+            <a:off x="640080" y="1828800"/>
+            <a:ext cx="6675120" cy="1645920"/>
           </a:xfrm>
           <a:prstGeom prst="rect">
             <a:avLst/>
@@ -4603,7 +4603,7 @@
           <a:lstStyle/>
           <a:p>
             <a:r>
-              <a:rPr sz="4400" b="1">
+              <a:rPr sz="4000" b="1">
                 <a:solidFill>
                   <a:srgbClr val="FFFFFF"/>
                 </a:solidFill>
@@ -4622,8 +4622,8 @@
         </p:nvSpPr>
         <p:spPr>
           <a:xfrm>
-            <a:off x="640080" y="3657600"/>
-            <a:ext cx="10789920" cy="1097280"/>
+            <a:off x="640080" y="3794760"/>
+            <a:ext cx="6675120" cy="1097280"/>
           </a:xfrm>
           <a:prstGeom prst="rect">
             <a:avLst/>
@@ -4637,7 +4637,7 @@
           <a:lstStyle/>
           <a:p>
             <a:r>
-              <a:rPr sz="2000" b="0">
+              <a:rPr sz="1800" b="0">
                 <a:solidFill>
                   <a:srgbClr val="B7CBDE"/>
                 </a:solidFill>
@@ -4656,8 +4656,8 @@
         </p:nvSpPr>
         <p:spPr>
           <a:xfrm>
-            <a:off x="640080" y="5029200"/>
-            <a:ext cx="10972800" cy="457200"/>
+            <a:off x="640080" y="5120640"/>
+            <a:ext cx="6766560" cy="457200"/>
           </a:xfrm>
           <a:prstGeom prst="rect">
             <a:avLst/>
@@ -4671,7 +4671,7 @@
           <a:lstStyle/>
           <a:p>
             <a:r>
-              <a:rPr sz="1600" b="0">
+              <a:rPr sz="1500" b="0">
                 <a:solidFill>
                   <a:srgbClr val="3EC6FF"/>
                 </a:solidFill>
@@ -4682,6 +4682,30 @@
           </a:p>
         </p:txBody>
       </p:sp>
+      <p:pic>
+        <p:nvPicPr>
+          <p:cNvPr id="7" name="Picture 6" descr="dw-interview.jpg"/>
+          <p:cNvPicPr>
+            <a:picLocks noChangeAspect="1"/>
+          </p:cNvPicPr>
+          <p:nvPr/>
+        </p:nvPicPr>
+        <p:blipFill>
+          <a:blip r:embed="rId2"/>
+          <a:stretch>
+            <a:fillRect/>
+          </a:stretch>
+        </p:blipFill>
+        <p:spPr>
+          <a:xfrm>
+            <a:off x="7452360" y="1325880"/>
+            <a:ext cx="4160520" cy="4160520"/>
+          </a:xfrm>
+          <a:prstGeom prst="rect">
+            <a:avLst/>
+          </a:prstGeom>
+        </p:spPr>
+      </p:pic>
     </p:spTree>
   </p:cSld>
   <p:clrMapOvr>
@@ -4785,8 +4809,8 @@
         </p:nvSpPr>
         <p:spPr>
           <a:xfrm>
-            <a:off x="640080" y="685800"/>
-            <a:ext cx="10972800" cy="1463040"/>
+            <a:off x="640080" y="658368"/>
+            <a:ext cx="7863840" cy="1645920"/>
           </a:xfrm>
           <a:prstGeom prst="rect">
             <a:avLst/>
@@ -4800,7 +4824,7 @@
           <a:lstStyle/>
           <a:p>
             <a:r>
-              <a:rPr sz="3200" b="1">
+              <a:rPr sz="3000" b="1">
                 <a:solidFill>
                   <a:srgbClr val="FFFFFF"/>
                 </a:solidFill>
@@ -4819,8 +4843,8 @@
         </p:nvSpPr>
         <p:spPr>
           <a:xfrm>
-            <a:off x="777240" y="2286000"/>
-            <a:ext cx="10607040" cy="4754880"/>
+            <a:off x="777240" y="2331720"/>
+            <a:ext cx="7498079" cy="4754880"/>
           </a:xfrm>
           <a:prstGeom prst="rect">
             <a:avLst/>
@@ -4839,7 +4863,7 @@
               </a:spcAft>
             </a:pPr>
             <a:r>
-              <a:rPr sz="2400" b="0">
+              <a:rPr sz="2200" b="0">
                 <a:solidFill>
                   <a:srgbClr val="FFB020"/>
                 </a:solidFill>
@@ -4850,6 +4874,30 @@
           </a:p>
         </p:txBody>
       </p:sp>
+      <p:pic>
+        <p:nvPicPr>
+          <p:cNvPr id="6" name="Picture 5" descr="dw-pause.jpg"/>
+          <p:cNvPicPr>
+            <a:picLocks noChangeAspect="1"/>
+          </p:cNvPicPr>
+          <p:nvPr/>
+        </p:nvPicPr>
+        <p:blipFill>
+          <a:blip r:embed="rId2"/>
+          <a:stretch>
+            <a:fillRect/>
+          </a:stretch>
+        </p:blipFill>
+        <p:spPr>
+          <a:xfrm>
+            <a:off x="8366760" y="1874519"/>
+            <a:ext cx="3246120" cy="3246120"/>
+          </a:xfrm>
+          <a:prstGeom prst="rect">
+            <a:avLst/>
+          </a:prstGeom>
+        </p:spPr>
+      </p:pic>
     </p:spTree>
   </p:cSld>
   <p:clrMapOvr>
@@ -4953,8 +5001,8 @@
         </p:nvSpPr>
         <p:spPr>
           <a:xfrm>
-            <a:off x="640080" y="685800"/>
-            <a:ext cx="10972800" cy="1463040"/>
+            <a:off x="640080" y="658368"/>
+            <a:ext cx="7863840" cy="1645920"/>
           </a:xfrm>
           <a:prstGeom prst="rect">
             <a:avLst/>
@@ -4968,7 +5016,7 @@
           <a:lstStyle/>
           <a:p>
             <a:r>
-              <a:rPr sz="3200" b="1">
+              <a:rPr sz="3000" b="1">
                 <a:solidFill>
                   <a:srgbClr val="FFFFFF"/>
                 </a:solidFill>
@@ -4987,8 +5035,8 @@
         </p:nvSpPr>
         <p:spPr>
           <a:xfrm>
-            <a:off x="777240" y="2286000"/>
-            <a:ext cx="10607040" cy="4754880"/>
+            <a:off x="777240" y="2331720"/>
+            <a:ext cx="7498079" cy="4754880"/>
           </a:xfrm>
           <a:prstGeom prst="rect">
             <a:avLst/>
@@ -5007,7 +5055,7 @@
               </a:spcAft>
             </a:pPr>
             <a:r>
-              <a:rPr sz="2400" b="0">
+              <a:rPr sz="2200" b="0">
                 <a:solidFill>
                   <a:srgbClr val="FFFFFF"/>
                 </a:solidFill>
@@ -5023,7 +5071,7 @@
               </a:spcAft>
             </a:pPr>
             <a:r>
-              <a:rPr sz="2400" b="0">
+              <a:rPr sz="2200" b="0">
                 <a:solidFill>
                   <a:srgbClr val="FFFFFF"/>
                 </a:solidFill>
@@ -5034,6 +5082,30 @@
           </a:p>
         </p:txBody>
       </p:sp>
+      <p:pic>
+        <p:nvPicPr>
+          <p:cNvPr id="6" name="Picture 5" descr="dw-interview.jpg"/>
+          <p:cNvPicPr>
+            <a:picLocks noChangeAspect="1"/>
+          </p:cNvPicPr>
+          <p:nvPr/>
+        </p:nvPicPr>
+        <p:blipFill>
+          <a:blip r:embed="rId2"/>
+          <a:stretch>
+            <a:fillRect/>
+          </a:stretch>
+        </p:blipFill>
+        <p:spPr>
+          <a:xfrm>
+            <a:off x="8732520" y="2057400"/>
+            <a:ext cx="2880360" cy="2880360"/>
+          </a:xfrm>
+          <a:prstGeom prst="rect">
+            <a:avLst/>
+          </a:prstGeom>
+        </p:spPr>
+      </p:pic>
     </p:spTree>
   </p:cSld>
   <p:clrMapOvr>
@@ -5137,8 +5209,8 @@
         </p:nvSpPr>
         <p:spPr>
           <a:xfrm>
-            <a:off x="640080" y="685800"/>
-            <a:ext cx="10972800" cy="1463040"/>
+            <a:off x="640080" y="658368"/>
+            <a:ext cx="7863840" cy="1645920"/>
           </a:xfrm>
           <a:prstGeom prst="rect">
             <a:avLst/>
@@ -5152,7 +5224,7 @@
           <a:lstStyle/>
           <a:p>
             <a:r>
-              <a:rPr sz="3200" b="1">
+              <a:rPr sz="3000" b="1">
                 <a:solidFill>
                   <a:srgbClr val="FFFFFF"/>
                 </a:solidFill>
@@ -5171,8 +5243,8 @@
         </p:nvSpPr>
         <p:spPr>
           <a:xfrm>
-            <a:off x="777240" y="2286000"/>
-            <a:ext cx="10607040" cy="4754880"/>
+            <a:off x="777240" y="2331720"/>
+            <a:ext cx="7498079" cy="4754880"/>
           </a:xfrm>
           <a:prstGeom prst="rect">
             <a:avLst/>
@@ -5191,7 +5263,7 @@
               </a:spcAft>
             </a:pPr>
             <a:r>
-              <a:rPr sz="2400" b="0">
+              <a:rPr sz="2200" b="0">
                 <a:solidFill>
                   <a:srgbClr val="FFB020"/>
                 </a:solidFill>
@@ -5202,6 +5274,30 @@
           </a:p>
         </p:txBody>
       </p:sp>
+      <p:pic>
+        <p:nvPicPr>
+          <p:cNvPr id="6" name="Picture 5" descr="dw-pause.jpg"/>
+          <p:cNvPicPr>
+            <a:picLocks noChangeAspect="1"/>
+          </p:cNvPicPr>
+          <p:nvPr/>
+        </p:nvPicPr>
+        <p:blipFill>
+          <a:blip r:embed="rId2"/>
+          <a:stretch>
+            <a:fillRect/>
+          </a:stretch>
+        </p:blipFill>
+        <p:spPr>
+          <a:xfrm>
+            <a:off x="8366760" y="1874519"/>
+            <a:ext cx="3246120" cy="3246120"/>
+          </a:xfrm>
+          <a:prstGeom prst="rect">
+            <a:avLst/>
+          </a:prstGeom>
+        </p:spPr>
+      </p:pic>
     </p:spTree>
   </p:cSld>
   <p:clrMapOvr>
@@ -5305,8 +5401,8 @@
         </p:nvSpPr>
         <p:spPr>
           <a:xfrm>
-            <a:off x="640080" y="685800"/>
-            <a:ext cx="10972800" cy="1463040"/>
+            <a:off x="640080" y="658368"/>
+            <a:ext cx="7863840" cy="1645920"/>
           </a:xfrm>
           <a:prstGeom prst="rect">
             <a:avLst/>
@@ -5320,7 +5416,7 @@
           <a:lstStyle/>
           <a:p>
             <a:r>
-              <a:rPr sz="3200" b="1">
+              <a:rPr sz="3000" b="1">
                 <a:solidFill>
                   <a:srgbClr val="FFFFFF"/>
                 </a:solidFill>
@@ -5339,8 +5435,8 @@
         </p:nvSpPr>
         <p:spPr>
           <a:xfrm>
-            <a:off x="777240" y="2286000"/>
-            <a:ext cx="10607040" cy="4754880"/>
+            <a:off x="777240" y="2331720"/>
+            <a:ext cx="7498079" cy="4754880"/>
           </a:xfrm>
           <a:prstGeom prst="rect">
             <a:avLst/>
@@ -5359,7 +5455,7 @@
               </a:spcAft>
             </a:pPr>
             <a:r>
-              <a:rPr sz="2400" b="0">
+              <a:rPr sz="2200" b="0">
                 <a:solidFill>
                   <a:srgbClr val="FFFFFF"/>
                 </a:solidFill>
@@ -5375,7 +5471,7 @@
               </a:spcAft>
             </a:pPr>
             <a:r>
-              <a:rPr sz="2400" b="0">
+              <a:rPr sz="2200" b="0">
                 <a:solidFill>
                   <a:srgbClr val="FFFFFF"/>
                 </a:solidFill>
@@ -5386,6 +5482,30 @@
           </a:p>
         </p:txBody>
       </p:sp>
+      <p:pic>
+        <p:nvPicPr>
+          <p:cNvPr id="6" name="Picture 5" descr="dw-interview.jpg"/>
+          <p:cNvPicPr>
+            <a:picLocks noChangeAspect="1"/>
+          </p:cNvPicPr>
+          <p:nvPr/>
+        </p:nvPicPr>
+        <p:blipFill>
+          <a:blip r:embed="rId2"/>
+          <a:stretch>
+            <a:fillRect/>
+          </a:stretch>
+        </p:blipFill>
+        <p:spPr>
+          <a:xfrm>
+            <a:off x="8732520" y="2057400"/>
+            <a:ext cx="2880360" cy="2880360"/>
+          </a:xfrm>
+          <a:prstGeom prst="rect">
+            <a:avLst/>
+          </a:prstGeom>
+        </p:spPr>
+      </p:pic>
     </p:spTree>
   </p:cSld>
   <p:clrMapOvr>
@@ -5489,8 +5609,8 @@
         </p:nvSpPr>
         <p:spPr>
           <a:xfrm>
-            <a:off x="640080" y="685800"/>
-            <a:ext cx="10972800" cy="1463040"/>
+            <a:off x="640080" y="658368"/>
+            <a:ext cx="7863840" cy="1645920"/>
           </a:xfrm>
           <a:prstGeom prst="rect">
             <a:avLst/>
@@ -5504,7 +5624,7 @@
           <a:lstStyle/>
           <a:p>
             <a:r>
-              <a:rPr sz="3200" b="1">
+              <a:rPr sz="3000" b="1">
                 <a:solidFill>
                   <a:srgbClr val="FFFFFF"/>
                 </a:solidFill>
@@ -5523,8 +5643,8 @@
         </p:nvSpPr>
         <p:spPr>
           <a:xfrm>
-            <a:off x="777240" y="2286000"/>
-            <a:ext cx="10607040" cy="4754880"/>
+            <a:off x="777240" y="2331720"/>
+            <a:ext cx="7498079" cy="4754880"/>
           </a:xfrm>
           <a:prstGeom prst="rect">
             <a:avLst/>
@@ -5543,7 +5663,7 @@
               </a:spcAft>
             </a:pPr>
             <a:r>
-              <a:rPr sz="2400" b="0">
+              <a:rPr sz="2200" b="0">
                 <a:solidFill>
                   <a:srgbClr val="FFB020"/>
                 </a:solidFill>
@@ -5554,6 +5674,30 @@
           </a:p>
         </p:txBody>
       </p:sp>
+      <p:pic>
+        <p:nvPicPr>
+          <p:cNvPr id="6" name="Picture 5" descr="dw-pause.jpg"/>
+          <p:cNvPicPr>
+            <a:picLocks noChangeAspect="1"/>
+          </p:cNvPicPr>
+          <p:nvPr/>
+        </p:nvPicPr>
+        <p:blipFill>
+          <a:blip r:embed="rId2"/>
+          <a:stretch>
+            <a:fillRect/>
+          </a:stretch>
+        </p:blipFill>
+        <p:spPr>
+          <a:xfrm>
+            <a:off x="8366760" y="1874519"/>
+            <a:ext cx="3246120" cy="3246120"/>
+          </a:xfrm>
+          <a:prstGeom prst="rect">
+            <a:avLst/>
+          </a:prstGeom>
+        </p:spPr>
+      </p:pic>
     </p:spTree>
   </p:cSld>
   <p:clrMapOvr>
@@ -5657,8 +5801,8 @@
         </p:nvSpPr>
         <p:spPr>
           <a:xfrm>
-            <a:off x="640080" y="685800"/>
-            <a:ext cx="10972800" cy="1463040"/>
+            <a:off x="640080" y="658368"/>
+            <a:ext cx="7863840" cy="1645920"/>
           </a:xfrm>
           <a:prstGeom prst="rect">
             <a:avLst/>
@@ -5672,7 +5816,7 @@
           <a:lstStyle/>
           <a:p>
             <a:r>
-              <a:rPr sz="3200" b="1">
+              <a:rPr sz="3000" b="1">
                 <a:solidFill>
                   <a:srgbClr val="FFFFFF"/>
                 </a:solidFill>
@@ -5691,8 +5835,8 @@
         </p:nvSpPr>
         <p:spPr>
           <a:xfrm>
-            <a:off x="777240" y="2286000"/>
-            <a:ext cx="10607040" cy="4754880"/>
+            <a:off x="777240" y="2331720"/>
+            <a:ext cx="7498079" cy="4754880"/>
           </a:xfrm>
           <a:prstGeom prst="rect">
             <a:avLst/>
@@ -5711,7 +5855,7 @@
               </a:spcAft>
             </a:pPr>
             <a:r>
-              <a:rPr sz="2400" b="0">
+              <a:rPr sz="2200" b="0">
                 <a:solidFill>
                   <a:srgbClr val="FFFFFF"/>
                 </a:solidFill>
@@ -5727,7 +5871,7 @@
               </a:spcAft>
             </a:pPr>
             <a:r>
-              <a:rPr sz="2400" b="0">
+              <a:rPr sz="2200" b="0">
                 <a:solidFill>
                   <a:srgbClr val="FFFFFF"/>
                 </a:solidFill>
@@ -5738,6 +5882,30 @@
           </a:p>
         </p:txBody>
       </p:sp>
+      <p:pic>
+        <p:nvPicPr>
+          <p:cNvPr id="6" name="Picture 5" descr="dw-interview.jpg"/>
+          <p:cNvPicPr>
+            <a:picLocks noChangeAspect="1"/>
+          </p:cNvPicPr>
+          <p:nvPr/>
+        </p:nvPicPr>
+        <p:blipFill>
+          <a:blip r:embed="rId2"/>
+          <a:stretch>
+            <a:fillRect/>
+          </a:stretch>
+        </p:blipFill>
+        <p:spPr>
+          <a:xfrm>
+            <a:off x="8732520" y="2057400"/>
+            <a:ext cx="2880360" cy="2880360"/>
+          </a:xfrm>
+          <a:prstGeom prst="rect">
+            <a:avLst/>
+          </a:prstGeom>
+        </p:spPr>
+      </p:pic>
     </p:spTree>
   </p:cSld>
   <p:clrMapOvr>
@@ -5841,8 +6009,8 @@
         </p:nvSpPr>
         <p:spPr>
           <a:xfrm>
-            <a:off x="640080" y="685800"/>
-            <a:ext cx="10972800" cy="1463040"/>
+            <a:off x="640080" y="658368"/>
+            <a:ext cx="7863840" cy="1645920"/>
           </a:xfrm>
           <a:prstGeom prst="rect">
             <a:avLst/>
@@ -5856,7 +6024,7 @@
           <a:lstStyle/>
           <a:p>
             <a:r>
-              <a:rPr sz="3200" b="1">
+              <a:rPr sz="3000" b="1">
                 <a:solidFill>
                   <a:srgbClr val="FFFFFF"/>
                 </a:solidFill>
@@ -5875,8 +6043,8 @@
         </p:nvSpPr>
         <p:spPr>
           <a:xfrm>
-            <a:off x="777240" y="2286000"/>
-            <a:ext cx="10607040" cy="4754880"/>
+            <a:off x="777240" y="2331720"/>
+            <a:ext cx="7498079" cy="4754880"/>
           </a:xfrm>
           <a:prstGeom prst="rect">
             <a:avLst/>
@@ -5895,7 +6063,7 @@
               </a:spcAft>
             </a:pPr>
             <a:r>
-              <a:rPr sz="2400" b="0">
+              <a:rPr sz="2200" b="0">
                 <a:solidFill>
                   <a:srgbClr val="FFFFFF"/>
                 </a:solidFill>
@@ -5906,6 +6074,30 @@
           </a:p>
         </p:txBody>
       </p:sp>
+      <p:pic>
+        <p:nvPicPr>
+          <p:cNvPr id="6" name="Picture 5" descr="dw-interview.jpg"/>
+          <p:cNvPicPr>
+            <a:picLocks noChangeAspect="1"/>
+          </p:cNvPicPr>
+          <p:nvPr/>
+        </p:nvPicPr>
+        <p:blipFill>
+          <a:blip r:embed="rId2"/>
+          <a:stretch>
+            <a:fillRect/>
+          </a:stretch>
+        </p:blipFill>
+        <p:spPr>
+          <a:xfrm>
+            <a:off x="8732520" y="2057400"/>
+            <a:ext cx="2880360" cy="2880360"/>
+          </a:xfrm>
+          <a:prstGeom prst="rect">
+            <a:avLst/>
+          </a:prstGeom>
+        </p:spPr>
+      </p:pic>
     </p:spTree>
   </p:cSld>
   <p:clrMapOvr>
@@ -6009,8 +6201,8 @@
         </p:nvSpPr>
         <p:spPr>
           <a:xfrm>
-            <a:off x="640080" y="685800"/>
-            <a:ext cx="10972800" cy="1463040"/>
+            <a:off x="640080" y="658368"/>
+            <a:ext cx="7863840" cy="1645920"/>
           </a:xfrm>
           <a:prstGeom prst="rect">
             <a:avLst/>
@@ -6024,7 +6216,7 @@
           <a:lstStyle/>
           <a:p>
             <a:r>
-              <a:rPr sz="3200" b="1">
+              <a:rPr sz="3000" b="1">
                 <a:solidFill>
                   <a:srgbClr val="FFFFFF"/>
                 </a:solidFill>
@@ -6043,8 +6235,8 @@
         </p:nvSpPr>
         <p:spPr>
           <a:xfrm>
-            <a:off x="777240" y="2286000"/>
-            <a:ext cx="10607040" cy="4754880"/>
+            <a:off x="777240" y="2331720"/>
+            <a:ext cx="7498079" cy="4754880"/>
           </a:xfrm>
           <a:prstGeom prst="rect">
             <a:avLst/>
@@ -6063,7 +6255,7 @@
               </a:spcAft>
             </a:pPr>
             <a:r>
-              <a:rPr sz="2400" b="0">
+              <a:rPr sz="2200" b="0">
                 <a:solidFill>
                   <a:srgbClr val="FFFFFF"/>
                 </a:solidFill>
@@ -6074,6 +6266,30 @@
           </a:p>
         </p:txBody>
       </p:sp>
+      <p:pic>
+        <p:nvPicPr>
+          <p:cNvPr id="6" name="Picture 5" descr="dw-interview.jpg"/>
+          <p:cNvPicPr>
+            <a:picLocks noChangeAspect="1"/>
+          </p:cNvPicPr>
+          <p:nvPr/>
+        </p:nvPicPr>
+        <p:blipFill>
+          <a:blip r:embed="rId2"/>
+          <a:stretch>
+            <a:fillRect/>
+          </a:stretch>
+        </p:blipFill>
+        <p:spPr>
+          <a:xfrm>
+            <a:off x="8732520" y="2057400"/>
+            <a:ext cx="2880360" cy="2880360"/>
+          </a:xfrm>
+          <a:prstGeom prst="rect">
+            <a:avLst/>
+          </a:prstGeom>
+        </p:spPr>
+      </p:pic>
     </p:spTree>
   </p:cSld>
   <p:clrMapOvr>
@@ -6177,8 +6393,8 @@
         </p:nvSpPr>
         <p:spPr>
           <a:xfrm>
-            <a:off x="640080" y="685800"/>
-            <a:ext cx="10972800" cy="1463040"/>
+            <a:off x="640080" y="658368"/>
+            <a:ext cx="7863840" cy="1645920"/>
           </a:xfrm>
           <a:prstGeom prst="rect">
             <a:avLst/>
@@ -6192,7 +6408,7 @@
           <a:lstStyle/>
           <a:p>
             <a:r>
-              <a:rPr sz="3200" b="1">
+              <a:rPr sz="3000" b="1">
                 <a:solidFill>
                   <a:srgbClr val="FFFFFF"/>
                 </a:solidFill>
@@ -6211,8 +6427,8 @@
         </p:nvSpPr>
         <p:spPr>
           <a:xfrm>
-            <a:off x="777240" y="2286000"/>
-            <a:ext cx="10607040" cy="4754880"/>
+            <a:off x="777240" y="2331720"/>
+            <a:ext cx="7498079" cy="4754880"/>
           </a:xfrm>
           <a:prstGeom prst="rect">
             <a:avLst/>
@@ -6231,7 +6447,7 @@
               </a:spcAft>
             </a:pPr>
             <a:r>
-              <a:rPr sz="2400" b="0">
+              <a:rPr sz="2200" b="0">
                 <a:solidFill>
                   <a:srgbClr val="FFFFFF"/>
                 </a:solidFill>
@@ -6247,7 +6463,7 @@
               </a:spcAft>
             </a:pPr>
             <a:r>
-              <a:rPr sz="2400" b="0">
+              <a:rPr sz="2200" b="0">
                 <a:solidFill>
                   <a:srgbClr val="FFFFFF"/>
                 </a:solidFill>
@@ -6263,7 +6479,7 @@
               </a:spcAft>
             </a:pPr>
             <a:r>
-              <a:rPr sz="2400" b="0">
+              <a:rPr sz="2200" b="0">
                 <a:solidFill>
                   <a:srgbClr val="FFFFFF"/>
                 </a:solidFill>
@@ -6279,7 +6495,7 @@
               </a:spcAft>
             </a:pPr>
             <a:r>
-              <a:rPr sz="2400" b="0">
+              <a:rPr sz="2200" b="0">
                 <a:solidFill>
                   <a:srgbClr val="FFFFFF"/>
                 </a:solidFill>
@@ -6290,6 +6506,30 @@
           </a:p>
         </p:txBody>
       </p:sp>
+      <p:pic>
+        <p:nvPicPr>
+          <p:cNvPr id="6" name="Picture 5" descr="dw-interview.jpg"/>
+          <p:cNvPicPr>
+            <a:picLocks noChangeAspect="1"/>
+          </p:cNvPicPr>
+          <p:nvPr/>
+        </p:nvPicPr>
+        <p:blipFill>
+          <a:blip r:embed="rId2"/>
+          <a:stretch>
+            <a:fillRect/>
+          </a:stretch>
+        </p:blipFill>
+        <p:spPr>
+          <a:xfrm>
+            <a:off x="8732520" y="2057400"/>
+            <a:ext cx="2880360" cy="2880360"/>
+          </a:xfrm>
+          <a:prstGeom prst="rect">
+            <a:avLst/>
+          </a:prstGeom>
+        </p:spPr>
+      </p:pic>
     </p:spTree>
   </p:cSld>
   <p:clrMapOvr>
@@ -6393,8 +6633,8 @@
         </p:nvSpPr>
         <p:spPr>
           <a:xfrm>
-            <a:off x="640080" y="685800"/>
-            <a:ext cx="10972800" cy="1463040"/>
+            <a:off x="640080" y="658368"/>
+            <a:ext cx="7863840" cy="1645920"/>
           </a:xfrm>
           <a:prstGeom prst="rect">
             <a:avLst/>
@@ -6408,7 +6648,7 @@
           <a:lstStyle/>
           <a:p>
             <a:r>
-              <a:rPr sz="3200" b="1">
+              <a:rPr sz="3000" b="1">
                 <a:solidFill>
                   <a:srgbClr val="FFFFFF"/>
                 </a:solidFill>
@@ -6427,8 +6667,8 @@
         </p:nvSpPr>
         <p:spPr>
           <a:xfrm>
-            <a:off x="777240" y="2286000"/>
-            <a:ext cx="10607040" cy="4754880"/>
+            <a:off x="777240" y="2331720"/>
+            <a:ext cx="7498079" cy="4754880"/>
           </a:xfrm>
           <a:prstGeom prst="rect">
             <a:avLst/>
@@ -6447,7 +6687,7 @@
               </a:spcAft>
             </a:pPr>
             <a:r>
-              <a:rPr sz="2400" b="0">
+              <a:rPr sz="2200" b="0">
                 <a:solidFill>
                   <a:srgbClr val="FFB020"/>
                 </a:solidFill>
@@ -6458,6 +6698,30 @@
           </a:p>
         </p:txBody>
       </p:sp>
+      <p:pic>
+        <p:nvPicPr>
+          <p:cNvPr id="6" name="Picture 5" descr="dw-pause.jpg"/>
+          <p:cNvPicPr>
+            <a:picLocks noChangeAspect="1"/>
+          </p:cNvPicPr>
+          <p:nvPr/>
+        </p:nvPicPr>
+        <p:blipFill>
+          <a:blip r:embed="rId2"/>
+          <a:stretch>
+            <a:fillRect/>
+          </a:stretch>
+        </p:blipFill>
+        <p:spPr>
+          <a:xfrm>
+            <a:off x="8366760" y="1874519"/>
+            <a:ext cx="3246120" cy="3246120"/>
+          </a:xfrm>
+          <a:prstGeom prst="rect">
+            <a:avLst/>
+          </a:prstGeom>
+        </p:spPr>
+      </p:pic>
     </p:spTree>
   </p:cSld>
   <p:clrMapOvr>
@@ -6561,8 +6825,8 @@
         </p:nvSpPr>
         <p:spPr>
           <a:xfrm>
-            <a:off x="640080" y="685800"/>
-            <a:ext cx="10972800" cy="1463040"/>
+            <a:off x="640080" y="658368"/>
+            <a:ext cx="7863840" cy="1645920"/>
           </a:xfrm>
           <a:prstGeom prst="rect">
             <a:avLst/>
@@ -6576,7 +6840,7 @@
           <a:lstStyle/>
           <a:p>
             <a:r>
-              <a:rPr sz="3200" b="1">
+              <a:rPr sz="3000" b="1">
                 <a:solidFill>
                   <a:srgbClr val="FFFFFF"/>
                 </a:solidFill>
@@ -6595,8 +6859,8 @@
         </p:nvSpPr>
         <p:spPr>
           <a:xfrm>
-            <a:off x="777240" y="2286000"/>
-            <a:ext cx="10607040" cy="4754880"/>
+            <a:off x="777240" y="2331720"/>
+            <a:ext cx="7498079" cy="4754880"/>
           </a:xfrm>
           <a:prstGeom prst="rect">
             <a:avLst/>
@@ -6615,7 +6879,7 @@
               </a:spcAft>
             </a:pPr>
             <a:r>
-              <a:rPr sz="2400" b="0">
+              <a:rPr sz="2200" b="0">
                 <a:solidFill>
                   <a:srgbClr val="FFFFFF"/>
                 </a:solidFill>
@@ -6631,7 +6895,7 @@
               </a:spcAft>
             </a:pPr>
             <a:r>
-              <a:rPr sz="2400" b="0">
+              <a:rPr sz="2200" b="0">
                 <a:solidFill>
                   <a:srgbClr val="FFFFFF"/>
                 </a:solidFill>
@@ -6647,7 +6911,7 @@
               </a:spcAft>
             </a:pPr>
             <a:r>
-              <a:rPr sz="2400" b="0">
+              <a:rPr sz="2200" b="0">
                 <a:solidFill>
                   <a:srgbClr val="FFFFFF"/>
                 </a:solidFill>
@@ -6658,6 +6922,30 @@
           </a:p>
         </p:txBody>
       </p:sp>
+      <p:pic>
+        <p:nvPicPr>
+          <p:cNvPr id="6" name="Picture 5" descr="dw-interview.jpg"/>
+          <p:cNvPicPr>
+            <a:picLocks noChangeAspect="1"/>
+          </p:cNvPicPr>
+          <p:nvPr/>
+        </p:nvPicPr>
+        <p:blipFill>
+          <a:blip r:embed="rId2"/>
+          <a:stretch>
+            <a:fillRect/>
+          </a:stretch>
+        </p:blipFill>
+        <p:spPr>
+          <a:xfrm>
+            <a:off x="8732520" y="2057400"/>
+            <a:ext cx="2880360" cy="2880360"/>
+          </a:xfrm>
+          <a:prstGeom prst="rect">
+            <a:avLst/>
+          </a:prstGeom>
+        </p:spPr>
+      </p:pic>
     </p:spTree>
   </p:cSld>
   <p:clrMapOvr>
@@ -6761,8 +7049,8 @@
         </p:nvSpPr>
         <p:spPr>
           <a:xfrm>
-            <a:off x="640080" y="685800"/>
-            <a:ext cx="10972800" cy="1463040"/>
+            <a:off x="640080" y="658368"/>
+            <a:ext cx="7863840" cy="1645920"/>
           </a:xfrm>
           <a:prstGeom prst="rect">
             <a:avLst/>
@@ -6776,7 +7064,7 @@
           <a:lstStyle/>
           <a:p>
             <a:r>
-              <a:rPr sz="3200" b="1">
+              <a:rPr sz="3000" b="1">
                 <a:solidFill>
                   <a:srgbClr val="FFFFFF"/>
                 </a:solidFill>
@@ -6795,8 +7083,8 @@
         </p:nvSpPr>
         <p:spPr>
           <a:xfrm>
-            <a:off x="777240" y="2286000"/>
-            <a:ext cx="10607040" cy="4754880"/>
+            <a:off x="777240" y="2331720"/>
+            <a:ext cx="7498079" cy="4754880"/>
           </a:xfrm>
           <a:prstGeom prst="rect">
             <a:avLst/>
@@ -6815,7 +7103,7 @@
               </a:spcAft>
             </a:pPr>
             <a:r>
-              <a:rPr sz="2400" b="0">
+              <a:rPr sz="2200" b="0">
                 <a:solidFill>
                   <a:srgbClr val="FFB020"/>
                 </a:solidFill>
@@ -6826,6 +7114,30 @@
           </a:p>
         </p:txBody>
       </p:sp>
+      <p:pic>
+        <p:nvPicPr>
+          <p:cNvPr id="6" name="Picture 5" descr="dw-pause.jpg"/>
+          <p:cNvPicPr>
+            <a:picLocks noChangeAspect="1"/>
+          </p:cNvPicPr>
+          <p:nvPr/>
+        </p:nvPicPr>
+        <p:blipFill>
+          <a:blip r:embed="rId2"/>
+          <a:stretch>
+            <a:fillRect/>
+          </a:stretch>
+        </p:blipFill>
+        <p:spPr>
+          <a:xfrm>
+            <a:off x="8366760" y="1874519"/>
+            <a:ext cx="3246120" cy="3246120"/>
+          </a:xfrm>
+          <a:prstGeom prst="rect">
+            <a:avLst/>
+          </a:prstGeom>
+        </p:spPr>
+      </p:pic>
     </p:spTree>
   </p:cSld>
   <p:clrMapOvr>
@@ -6929,8 +7241,8 @@
         </p:nvSpPr>
         <p:spPr>
           <a:xfrm>
-            <a:off x="640080" y="685800"/>
-            <a:ext cx="10972800" cy="1463040"/>
+            <a:off x="640080" y="658368"/>
+            <a:ext cx="7863840" cy="1645920"/>
           </a:xfrm>
           <a:prstGeom prst="rect">
             <a:avLst/>
@@ -6944,7 +7256,7 @@
           <a:lstStyle/>
           <a:p>
             <a:r>
-              <a:rPr sz="3200" b="1">
+              <a:rPr sz="3000" b="1">
                 <a:solidFill>
                   <a:srgbClr val="FFFFFF"/>
                 </a:solidFill>
@@ -6963,8 +7275,8 @@
         </p:nvSpPr>
         <p:spPr>
           <a:xfrm>
-            <a:off x="777240" y="2286000"/>
-            <a:ext cx="10607040" cy="4754880"/>
+            <a:off x="777240" y="2331720"/>
+            <a:ext cx="7498079" cy="4754880"/>
           </a:xfrm>
           <a:prstGeom prst="rect">
             <a:avLst/>
@@ -6983,7 +7295,7 @@
               </a:spcAft>
             </a:pPr>
             <a:r>
-              <a:rPr sz="2400" b="0">
+              <a:rPr sz="2200" b="0">
                 <a:solidFill>
                   <a:srgbClr val="FFFFFF"/>
                 </a:solidFill>
@@ -6999,7 +7311,7 @@
               </a:spcAft>
             </a:pPr>
             <a:r>
-              <a:rPr sz="2400" b="0">
+              <a:rPr sz="2200" b="0">
                 <a:solidFill>
                   <a:srgbClr val="FFFFFF"/>
                 </a:solidFill>
@@ -7015,7 +7327,7 @@
               </a:spcAft>
             </a:pPr>
             <a:r>
-              <a:rPr sz="2400" b="0">
+              <a:rPr sz="2200" b="0">
                 <a:solidFill>
                   <a:srgbClr val="FFFFFF"/>
                 </a:solidFill>
@@ -7026,6 +7338,30 @@
           </a:p>
         </p:txBody>
       </p:sp>
+      <p:pic>
+        <p:nvPicPr>
+          <p:cNvPr id="6" name="Picture 5" descr="dw-interview.jpg"/>
+          <p:cNvPicPr>
+            <a:picLocks noChangeAspect="1"/>
+          </p:cNvPicPr>
+          <p:nvPr/>
+        </p:nvPicPr>
+        <p:blipFill>
+          <a:blip r:embed="rId2"/>
+          <a:stretch>
+            <a:fillRect/>
+          </a:stretch>
+        </p:blipFill>
+        <p:spPr>
+          <a:xfrm>
+            <a:off x="8732520" y="2057400"/>
+            <a:ext cx="2880360" cy="2880360"/>
+          </a:xfrm>
+          <a:prstGeom prst="rect">
+            <a:avLst/>
+          </a:prstGeom>
+        </p:spPr>
+      </p:pic>
     </p:spTree>
   </p:cSld>
   <p:clrMapOvr>
@@ -7129,8 +7465,8 @@
         </p:nvSpPr>
         <p:spPr>
           <a:xfrm>
-            <a:off x="640080" y="685800"/>
-            <a:ext cx="10972800" cy="1463040"/>
+            <a:off x="640080" y="658368"/>
+            <a:ext cx="7863840" cy="1645920"/>
           </a:xfrm>
           <a:prstGeom prst="rect">
             <a:avLst/>
@@ -7144,7 +7480,7 @@
           <a:lstStyle/>
           <a:p>
             <a:r>
-              <a:rPr sz="3200" b="1">
+              <a:rPr sz="3000" b="1">
                 <a:solidFill>
                   <a:srgbClr val="FFFFFF"/>
                 </a:solidFill>
@@ -7163,8 +7499,8 @@
         </p:nvSpPr>
         <p:spPr>
           <a:xfrm>
-            <a:off x="777240" y="2286000"/>
-            <a:ext cx="10607040" cy="4754880"/>
+            <a:off x="777240" y="2331720"/>
+            <a:ext cx="7498079" cy="4754880"/>
           </a:xfrm>
           <a:prstGeom prst="rect">
             <a:avLst/>
@@ -7183,7 +7519,7 @@
               </a:spcAft>
             </a:pPr>
             <a:r>
-              <a:rPr sz="2400" b="0">
+              <a:rPr sz="2200" b="0">
                 <a:solidFill>
                   <a:srgbClr val="FFB020"/>
                 </a:solidFill>
@@ -7194,6 +7530,30 @@
           </a:p>
         </p:txBody>
       </p:sp>
+      <p:pic>
+        <p:nvPicPr>
+          <p:cNvPr id="6" name="Picture 5" descr="dw-pause.jpg"/>
+          <p:cNvPicPr>
+            <a:picLocks noChangeAspect="1"/>
+          </p:cNvPicPr>
+          <p:nvPr/>
+        </p:nvPicPr>
+        <p:blipFill>
+          <a:blip r:embed="rId2"/>
+          <a:stretch>
+            <a:fillRect/>
+          </a:stretch>
+        </p:blipFill>
+        <p:spPr>
+          <a:xfrm>
+            <a:off x="8366760" y="1874519"/>
+            <a:ext cx="3246120" cy="3246120"/>
+          </a:xfrm>
+          <a:prstGeom prst="rect">
+            <a:avLst/>
+          </a:prstGeom>
+        </p:spPr>
+      </p:pic>
     </p:spTree>
   </p:cSld>
   <p:clrMapOvr>
@@ -7297,8 +7657,8 @@
         </p:nvSpPr>
         <p:spPr>
           <a:xfrm>
-            <a:off x="640080" y="685800"/>
-            <a:ext cx="10972800" cy="1463040"/>
+            <a:off x="640080" y="658368"/>
+            <a:ext cx="7863840" cy="1645920"/>
           </a:xfrm>
           <a:prstGeom prst="rect">
             <a:avLst/>
@@ -7312,7 +7672,7 @@
           <a:lstStyle/>
           <a:p>
             <a:r>
-              <a:rPr sz="3200" b="1">
+              <a:rPr sz="3000" b="1">
                 <a:solidFill>
                   <a:srgbClr val="FFFFFF"/>
                 </a:solidFill>
@@ -7331,8 +7691,8 @@
         </p:nvSpPr>
         <p:spPr>
           <a:xfrm>
-            <a:off x="777240" y="2286000"/>
-            <a:ext cx="10607040" cy="4754880"/>
+            <a:off x="777240" y="2331720"/>
+            <a:ext cx="7498079" cy="4754880"/>
           </a:xfrm>
           <a:prstGeom prst="rect">
             <a:avLst/>
@@ -7351,7 +7711,7 @@
               </a:spcAft>
             </a:pPr>
             <a:r>
-              <a:rPr sz="2400" b="0">
+              <a:rPr sz="2200" b="0">
                 <a:solidFill>
                   <a:srgbClr val="FFFFFF"/>
                 </a:solidFill>
@@ -7367,7 +7727,7 @@
               </a:spcAft>
             </a:pPr>
             <a:r>
-              <a:rPr sz="2400" b="0">
+              <a:rPr sz="2200" b="0">
                 <a:solidFill>
                   <a:srgbClr val="FFFFFF"/>
                 </a:solidFill>
@@ -7378,6 +7738,30 @@
           </a:p>
         </p:txBody>
       </p:sp>
+      <p:pic>
+        <p:nvPicPr>
+          <p:cNvPr id="6" name="Picture 5" descr="dw-interview.jpg"/>
+          <p:cNvPicPr>
+            <a:picLocks noChangeAspect="1"/>
+          </p:cNvPicPr>
+          <p:nvPr/>
+        </p:nvPicPr>
+        <p:blipFill>
+          <a:blip r:embed="rId2"/>
+          <a:stretch>
+            <a:fillRect/>
+          </a:stretch>
+        </p:blipFill>
+        <p:spPr>
+          <a:xfrm>
+            <a:off x="8732520" y="2057400"/>
+            <a:ext cx="2880360" cy="2880360"/>
+          </a:xfrm>
+          <a:prstGeom prst="rect">
+            <a:avLst/>
+          </a:prstGeom>
+        </p:spPr>
+      </p:pic>
     </p:spTree>
   </p:cSld>
   <p:clrMapOvr>
